--- a/generated/Tier 1 Broker Scorecards/Lone Star Direct Insurance Agency LLC_Broker_Scorecard.pptx
+++ b/generated/Tier 1 Broker Scorecards/Lone Star Direct Insurance Agency LLC_Broker_Scorecard.pptx
@@ -3394,7 +3394,7 @@
                         <a:rPr sz="900">
                           <a:latin typeface="Segoe UI"/>
                         </a:rPr>
-                        <a:t>Tier 1  |  4.17% / 15.00%</a:t>
+                        <a:t>Tier 1  |  4.10% / 15.00%</a:t>
                       </a:r>
                     </a:p>
                   </a:txBody>
@@ -3653,7 +3653,7 @@
                         <a:rPr sz="900">
                           <a:latin typeface="Segoe UI"/>
                         </a:rPr>
-                        <a:t>Fleet Subs: 63  |  Binds: 3</a:t>
+                        <a:t>Fleet Subs: 65  |  Binds: 3</a:t>
                       </a:r>
                     </a:p>
                   </a:txBody>
@@ -3690,7 +3690,7 @@
                         <a:rPr sz="900">
                           <a:latin typeface="Segoe UI"/>
                         </a:rPr>
-                        <a:t>Fleet Bound Premium: $224,841.11</a:t>
+                        <a:t>Fleet Bound Premium: $223,696.47</a:t>
                       </a:r>
                     </a:p>
                   </a:txBody>
@@ -3727,7 +3727,7 @@
                         <a:rPr sz="900">
                           <a:latin typeface="Segoe UI"/>
                         </a:rPr>
-                        <a:t>Fleet Book %: 79.6%</a:t>
+                        <a:t>Fleet Book %: 79.2%</a:t>
                       </a:r>
                     </a:p>
                   </a:txBody>
@@ -3766,7 +3766,7 @@
                         <a:rPr sz="900">
                           <a:latin typeface="Segoe UI"/>
                         </a:rPr>
-                        <a:t>Non-Fleet Subs: 177  |  Binds: 7</a:t>
+                        <a:t>Non-Fleet Subs: 179  |  Binds: 7</a:t>
                       </a:r>
                     </a:p>
                   </a:txBody>
@@ -3803,7 +3803,7 @@
                         <a:rPr sz="900">
                           <a:latin typeface="Segoe UI"/>
                         </a:rPr>
-                        <a:t>Non-Fleet Bound Premium: $57,466.53</a:t>
+                        <a:t>Non-Fleet Bound Premium: $58,611.17</a:t>
                       </a:r>
                     </a:p>
                   </a:txBody>
@@ -3840,7 +3840,7 @@
                         <a:rPr sz="900">
                           <a:latin typeface="Segoe UI"/>
                         </a:rPr>
-                        <a:t>Non-Fleet Book %: 20.4%</a:t>
+                        <a:t>Non-Fleet Book %: 20.8%</a:t>
                       </a:r>
                     </a:p>
                   </a:txBody>
@@ -4428,7 +4428,7 @@
                           </a:solidFill>
                           <a:latin typeface="Segoe UI"/>
                         </a:rPr>
-                        <a:t>31</a:t>
+                        <a:t>35</a:t>
                       </a:r>
                     </a:p>
                   </a:txBody>
@@ -4707,7 +4707,7 @@
                           </a:solidFill>
                           <a:latin typeface="Segoe UI"/>
                         </a:rPr>
-                        <a:t>9.7%</a:t>
+                        <a:t>8.6%</a:t>
                       </a:r>
                     </a:p>
                   </a:txBody>

--- a/generated/Tier 1 Broker Scorecards/Lone Star Direct Insurance Agency LLC_Broker_Scorecard.pptx
+++ b/generated/Tier 1 Broker Scorecards/Lone Star Direct Insurance Agency LLC_Broker_Scorecard.pptx
@@ -3394,7 +3394,7 @@
                         <a:rPr sz="900">
                           <a:latin typeface="Segoe UI"/>
                         </a:rPr>
-                        <a:t>Tier 1  |  4.10% / 15.00%</a:t>
+                        <a:t>Tier 1  |  4.08% / 15.00%</a:t>
                       </a:r>
                     </a:p>
                   </a:txBody>
@@ -3690,7 +3690,7 @@
                         <a:rPr sz="900">
                           <a:latin typeface="Segoe UI"/>
                         </a:rPr>
-                        <a:t>Fleet Bound Premium: $223,696.47</a:t>
+                        <a:t>Fleet Bound Premium: $218,156.92</a:t>
                       </a:r>
                     </a:p>
                   </a:txBody>
@@ -3727,7 +3727,7 @@
                         <a:rPr sz="900">
                           <a:latin typeface="Segoe UI"/>
                         </a:rPr>
-                        <a:t>Fleet Book %: 79.2%</a:t>
+                        <a:t>Fleet Book %: 77.3%</a:t>
                       </a:r>
                     </a:p>
                   </a:txBody>
@@ -3766,7 +3766,7 @@
                         <a:rPr sz="900">
                           <a:latin typeface="Segoe UI"/>
                         </a:rPr>
-                        <a:t>Non-Fleet Subs: 179  |  Binds: 7</a:t>
+                        <a:t>Non-Fleet Subs: 180  |  Binds: 7</a:t>
                       </a:r>
                     </a:p>
                   </a:txBody>
@@ -3803,7 +3803,7 @@
                         <a:rPr sz="900">
                           <a:latin typeface="Segoe UI"/>
                         </a:rPr>
-                        <a:t>Non-Fleet Bound Premium: $58,611.17</a:t>
+                        <a:t>Non-Fleet Bound Premium: $64,150.72</a:t>
                       </a:r>
                     </a:p>
                   </a:txBody>
@@ -3840,7 +3840,7 @@
                         <a:rPr sz="900">
                           <a:latin typeface="Segoe UI"/>
                         </a:rPr>
-                        <a:t>Non-Fleet Book %: 20.8%</a:t>
+                        <a:t>Non-Fleet Book %: 22.7%</a:t>
                       </a:r>
                     </a:p>
                   </a:txBody>
@@ -4428,7 +4428,7 @@
                           </a:solidFill>
                           <a:latin typeface="Segoe UI"/>
                         </a:rPr>
-                        <a:t>35</a:t>
+                        <a:t>39</a:t>
                       </a:r>
                     </a:p>
                   </a:txBody>
@@ -4707,7 +4707,7 @@
                           </a:solidFill>
                           <a:latin typeface="Segoe UI"/>
                         </a:rPr>
-                        <a:t>8.6%</a:t>
+                        <a:t>15.4%</a:t>
                       </a:r>
                     </a:p>
                   </a:txBody>
@@ -4983,7 +4983,7 @@
                           </a:solidFill>
                           <a:latin typeface="Segoe UI"/>
                         </a:rPr>
-                        <a:t>3</a:t>
+                        <a:t>6</a:t>
                       </a:r>
                     </a:p>
                   </a:txBody>

--- a/generated/Tier 1 Broker Scorecards/Lone Star Direct Insurance Agency LLC_Broker_Scorecard.pptx
+++ b/generated/Tier 1 Broker Scorecards/Lone Star Direct Insurance Agency LLC_Broker_Scorecard.pptx
@@ -3357,7 +3357,7 @@
                         <a:rPr sz="800">
                           <a:latin typeface="Segoe UI"/>
                         </a:rPr>
-                        <a:t>$1,268,463.18 / $1,049,265.26 / $282,307.64</a:t>
+                        <a:t>$1,268,463.18 / $1,045,654.64 / $278,697.02</a:t>
                       </a:r>
                     </a:p>
                   </a:txBody>
@@ -3394,7 +3394,7 @@
                         <a:rPr sz="900">
                           <a:latin typeface="Segoe UI"/>
                         </a:rPr>
-                        <a:t>Tier 1  |  4.08% / 15.00%</a:t>
+                        <a:t>Tier 1  |  3.66% / 15.00%</a:t>
                       </a:r>
                     </a:p>
                   </a:txBody>
@@ -3431,7 +3431,7 @@
                         <a:rPr sz="900">
                           <a:latin typeface="Segoe UI"/>
                         </a:rPr>
-                        <a:t>$1,775,848.45  (15.9% achieved)</a:t>
+                        <a:t>$1,775,848.45  (15.7% achieved)</a:t>
                       </a:r>
                     </a:p>
                   </a:txBody>
@@ -3653,7 +3653,7 @@
                         <a:rPr sz="900">
                           <a:latin typeface="Segoe UI"/>
                         </a:rPr>
-                        <a:t>Fleet Subs: 65  |  Binds: 3</a:t>
+                        <a:t>Fleet Subs: 66  |  Binds: 3</a:t>
                       </a:r>
                     </a:p>
                   </a:txBody>
@@ -3690,7 +3690,7 @@
                         <a:rPr sz="900">
                           <a:latin typeface="Segoe UI"/>
                         </a:rPr>
-                        <a:t>Fleet Bound Premium: $218,156.92</a:t>
+                        <a:t>Fleet Bound Premium: $233,569.62</a:t>
                       </a:r>
                     </a:p>
                   </a:txBody>
@@ -3727,7 +3727,7 @@
                         <a:rPr sz="900">
                           <a:latin typeface="Segoe UI"/>
                         </a:rPr>
-                        <a:t>Fleet Book %: 77.3%</a:t>
+                        <a:t>Fleet Book %: 83.8%</a:t>
                       </a:r>
                     </a:p>
                   </a:txBody>
@@ -3766,7 +3766,7 @@
                         <a:rPr sz="900">
                           <a:latin typeface="Segoe UI"/>
                         </a:rPr>
-                        <a:t>Non-Fleet Subs: 180  |  Binds: 7</a:t>
+                        <a:t>Non-Fleet Subs: 180  |  Binds: 6</a:t>
                       </a:r>
                     </a:p>
                   </a:txBody>
@@ -3803,7 +3803,7 @@
                         <a:rPr sz="900">
                           <a:latin typeface="Segoe UI"/>
                         </a:rPr>
-                        <a:t>Non-Fleet Bound Premium: $64,150.72</a:t>
+                        <a:t>Non-Fleet Bound Premium: $45,127.40</a:t>
                       </a:r>
                     </a:p>
                   </a:txBody>
@@ -3840,7 +3840,7 @@
                         <a:rPr sz="900">
                           <a:latin typeface="Segoe UI"/>
                         </a:rPr>
-                        <a:t>Non-Fleet Book %: 22.7%</a:t>
+                        <a:t>Non-Fleet Book %: 16.2%</a:t>
                       </a:r>
                     </a:p>
                   </a:txBody>
@@ -4428,7 +4428,7 @@
                           </a:solidFill>
                           <a:latin typeface="Segoe UI"/>
                         </a:rPr>
-                        <a:t>39</a:t>
+                        <a:t>40</a:t>
                       </a:r>
                     </a:p>
                   </a:txBody>
@@ -4707,7 +4707,7 @@
                           </a:solidFill>
                           <a:latin typeface="Segoe UI"/>
                         </a:rPr>
-                        <a:t>15.4%</a:t>
+                        <a:t>12.5%</a:t>
                       </a:r>
                     </a:p>
                   </a:txBody>
@@ -4983,7 +4983,7 @@
                           </a:solidFill>
                           <a:latin typeface="Segoe UI"/>
                         </a:rPr>
-                        <a:t>6</a:t>
+                        <a:t>5</a:t>
                       </a:r>
                     </a:p>
                   </a:txBody>
@@ -5259,7 +5259,7 @@
                           </a:solidFill>
                           <a:latin typeface="Segoe UI"/>
                         </a:rPr>
-                        <a:t>$24.9K</a:t>
+                        <a:t>$21.3K</a:t>
                       </a:r>
                     </a:p>
                   </a:txBody>

--- a/generated/Tier 1 Broker Scorecards/Lone Star Direct Insurance Agency LLC_Broker_Scorecard.pptx
+++ b/generated/Tier 1 Broker Scorecards/Lone Star Direct Insurance Agency LLC_Broker_Scorecard.pptx
@@ -3357,7 +3357,7 @@
                         <a:rPr sz="800">
                           <a:latin typeface="Segoe UI"/>
                         </a:rPr>
-                        <a:t>$1,268,463.18 / $1,045,654.64 / $278,697.02</a:t>
+                        <a:t>$1,268,463.18 / $1,050,162.29 / $283,204.67</a:t>
                       </a:r>
                     </a:p>
                   </a:txBody>
@@ -3394,7 +3394,7 @@
                         <a:rPr sz="900">
                           <a:latin typeface="Segoe UI"/>
                         </a:rPr>
-                        <a:t>Tier 1  |  3.66% / 15.00%</a:t>
+                        <a:t>Tier 1  |  3.97% / 15.00%</a:t>
                       </a:r>
                     </a:p>
                   </a:txBody>
@@ -3431,7 +3431,7 @@
                         <a:rPr sz="900">
                           <a:latin typeface="Segoe UI"/>
                         </a:rPr>
-                        <a:t>$1,775,848.45  (15.7% achieved)</a:t>
+                        <a:t>$1,775,848.45  (15.9% achieved)</a:t>
                       </a:r>
                     </a:p>
                   </a:txBody>
@@ -3653,7 +3653,7 @@
                         <a:rPr sz="900">
                           <a:latin typeface="Segoe UI"/>
                         </a:rPr>
-                        <a:t>Fleet Subs: 66  |  Binds: 3</a:t>
+                        <a:t>Fleet Subs: 70  |  Binds: 3</a:t>
                       </a:r>
                     </a:p>
                   </a:txBody>
@@ -3690,7 +3690,7 @@
                         <a:rPr sz="900">
                           <a:latin typeface="Segoe UI"/>
                         </a:rPr>
-                        <a:t>Fleet Bound Premium: $233,569.62</a:t>
+                        <a:t>Fleet Bound Premium: $236,317.04</a:t>
                       </a:r>
                     </a:p>
                   </a:txBody>
@@ -3727,7 +3727,7 @@
                         <a:rPr sz="900">
                           <a:latin typeface="Segoe UI"/>
                         </a:rPr>
-                        <a:t>Fleet Book %: 83.8%</a:t>
+                        <a:t>Fleet Book %: 83.4%</a:t>
                       </a:r>
                     </a:p>
                   </a:txBody>
@@ -3766,7 +3766,7 @@
                         <a:rPr sz="900">
                           <a:latin typeface="Segoe UI"/>
                         </a:rPr>
-                        <a:t>Non-Fleet Subs: 180  |  Binds: 6</a:t>
+                        <a:t>Non-Fleet Subs: 182  |  Binds: 7</a:t>
                       </a:r>
                     </a:p>
                   </a:txBody>
@@ -3803,7 +3803,7 @@
                         <a:rPr sz="900">
                           <a:latin typeface="Segoe UI"/>
                         </a:rPr>
-                        <a:t>Non-Fleet Bound Premium: $45,127.40</a:t>
+                        <a:t>Non-Fleet Bound Premium: $46,887.63</a:t>
                       </a:r>
                     </a:p>
                   </a:txBody>
@@ -3840,7 +3840,7 @@
                         <a:rPr sz="900">
                           <a:latin typeface="Segoe UI"/>
                         </a:rPr>
-                        <a:t>Non-Fleet Book %: 16.2%</a:t>
+                        <a:t>Non-Fleet Book %: 16.6%</a:t>
                       </a:r>
                     </a:p>
                   </a:txBody>
@@ -4428,7 +4428,7 @@
                           </a:solidFill>
                           <a:latin typeface="Segoe UI"/>
                         </a:rPr>
-                        <a:t>40</a:t>
+                        <a:t>46</a:t>
                       </a:r>
                     </a:p>
                   </a:txBody>
@@ -4707,7 +4707,7 @@
                           </a:solidFill>
                           <a:latin typeface="Segoe UI"/>
                         </a:rPr>
-                        <a:t>12.5%</a:t>
+                        <a:t>10.9%</a:t>
                       </a:r>
                     </a:p>
                   </a:txBody>
@@ -5259,7 +5259,7 @@
                           </a:solidFill>
                           <a:latin typeface="Segoe UI"/>
                         </a:rPr>
-                        <a:t>$21.3K</a:t>
+                        <a:t>$25.8K</a:t>
                       </a:r>
                     </a:p>
                   </a:txBody>

--- a/generated/Tier 1 Broker Scorecards/Lone Star Direct Insurance Agency LLC_Broker_Scorecard.pptx
+++ b/generated/Tier 1 Broker Scorecards/Lone Star Direct Insurance Agency LLC_Broker_Scorecard.pptx
@@ -3394,7 +3394,7 @@
                         <a:rPr sz="900">
                           <a:latin typeface="Segoe UI"/>
                         </a:rPr>
-                        <a:t>Tier 1  |  3.97% / 15.00%</a:t>
+                        <a:t>Tier 1  |  3.94% / 15.00%</a:t>
                       </a:r>
                     </a:p>
                   </a:txBody>
@@ -3653,7 +3653,7 @@
                         <a:rPr sz="900">
                           <a:latin typeface="Segoe UI"/>
                         </a:rPr>
-                        <a:t>Fleet Subs: 70  |  Binds: 3</a:t>
+                        <a:t>Fleet Subs: 71  |  Binds: 3</a:t>
                       </a:r>
                     </a:p>
                   </a:txBody>
@@ -3766,7 +3766,7 @@
                         <a:rPr sz="900">
                           <a:latin typeface="Segoe UI"/>
                         </a:rPr>
-                        <a:t>Non-Fleet Subs: 182  |  Binds: 7</a:t>
+                        <a:t>Non-Fleet Subs: 183  |  Binds: 7</a:t>
                       </a:r>
                     </a:p>
                   </a:txBody>
@@ -4428,7 +4428,7 @@
                           </a:solidFill>
                           <a:latin typeface="Segoe UI"/>
                         </a:rPr>
-                        <a:t>46</a:t>
+                        <a:t>48</a:t>
                       </a:r>
                     </a:p>
                   </a:txBody>
@@ -4707,7 +4707,7 @@
                           </a:solidFill>
                           <a:latin typeface="Segoe UI"/>
                         </a:rPr>
-                        <a:t>10.9%</a:t>
+                        <a:t>10.4%</a:t>
                       </a:r>
                     </a:p>
                   </a:txBody>

--- a/generated/Tier 1 Broker Scorecards/Lone Star Direct Insurance Agency LLC_Broker_Scorecard.pptx
+++ b/generated/Tier 1 Broker Scorecards/Lone Star Direct Insurance Agency LLC_Broker_Scorecard.pptx
@@ -3394,7 +3394,7 @@
                         <a:rPr sz="900">
                           <a:latin typeface="Segoe UI"/>
                         </a:rPr>
-                        <a:t>Tier 1  |  3.94% / 15.00%</a:t>
+                        <a:t>Tier 1  |  3.50% / 15.00%</a:t>
                       </a:r>
                     </a:p>
                   </a:txBody>
@@ -3653,7 +3653,7 @@
                         <a:rPr sz="900">
                           <a:latin typeface="Segoe UI"/>
                         </a:rPr>
-                        <a:t>Fleet Subs: 71  |  Binds: 3</a:t>
+                        <a:t>Fleet Subs: 72  |  Binds: 3</a:t>
                       </a:r>
                     </a:p>
                   </a:txBody>
@@ -3690,7 +3690,7 @@
                         <a:rPr sz="900">
                           <a:latin typeface="Segoe UI"/>
                         </a:rPr>
-                        <a:t>Fleet Bound Premium: $236,317.04</a:t>
+                        <a:t>Fleet Bound Premium: $244,720.85</a:t>
                       </a:r>
                     </a:p>
                   </a:txBody>
@@ -3727,7 +3727,7 @@
                         <a:rPr sz="900">
                           <a:latin typeface="Segoe UI"/>
                         </a:rPr>
-                        <a:t>Fleet Book %: 83.4%</a:t>
+                        <a:t>Fleet Book %: 86.4%</a:t>
                       </a:r>
                     </a:p>
                   </a:txBody>
@@ -3766,7 +3766,7 @@
                         <a:rPr sz="900">
                           <a:latin typeface="Segoe UI"/>
                         </a:rPr>
-                        <a:t>Non-Fleet Subs: 183  |  Binds: 7</a:t>
+                        <a:t>Non-Fleet Subs: 185  |  Binds: 6</a:t>
                       </a:r>
                     </a:p>
                   </a:txBody>
@@ -3803,7 +3803,7 @@
                         <a:rPr sz="900">
                           <a:latin typeface="Segoe UI"/>
                         </a:rPr>
-                        <a:t>Non-Fleet Bound Premium: $46,887.63</a:t>
+                        <a:t>Non-Fleet Bound Premium: $38,483.82</a:t>
                       </a:r>
                     </a:p>
                   </a:txBody>
@@ -3840,7 +3840,7 @@
                         <a:rPr sz="900">
                           <a:latin typeface="Segoe UI"/>
                         </a:rPr>
-                        <a:t>Non-Fleet Book %: 16.6%</a:t>
+                        <a:t>Non-Fleet Book %: 13.6%</a:t>
                       </a:r>
                     </a:p>
                   </a:txBody>
@@ -4428,7 +4428,7 @@
                           </a:solidFill>
                           <a:latin typeface="Segoe UI"/>
                         </a:rPr>
-                        <a:t>48</a:t>
+                        <a:t>51</a:t>
                       </a:r>
                     </a:p>
                   </a:txBody>
@@ -4707,7 +4707,7 @@
                           </a:solidFill>
                           <a:latin typeface="Segoe UI"/>
                         </a:rPr>
-                        <a:t>10.4%</a:t>
+                        <a:t>7.8%</a:t>
                       </a:r>
                     </a:p>
                   </a:txBody>
@@ -4983,7 +4983,7 @@
                           </a:solidFill>
                           <a:latin typeface="Segoe UI"/>
                         </a:rPr>
-                        <a:t>5</a:t>
+                        <a:t>4</a:t>
                       </a:r>
                     </a:p>
                   </a:txBody>

--- a/generated/Tier 1 Broker Scorecards/Lone Star Direct Insurance Agency LLC_Broker_Scorecard.pptx
+++ b/generated/Tier 1 Broker Scorecards/Lone Star Direct Insurance Agency LLC_Broker_Scorecard.pptx
@@ -3357,7 +3357,7 @@
                         <a:rPr sz="800">
                           <a:latin typeface="Segoe UI"/>
                         </a:rPr>
-                        <a:t>$1,268,463.18 / $1,050,162.29 / $283,204.67</a:t>
+                        <a:t>$1,268,463.18 / $1,098,788.64 / $331,831.02</a:t>
                       </a:r>
                     </a:p>
                   </a:txBody>
@@ -3394,7 +3394,7 @@
                         <a:rPr sz="900">
                           <a:latin typeface="Segoe UI"/>
                         </a:rPr>
-                        <a:t>Tier 1  |  3.50% / 15.00%</a:t>
+                        <a:t>Tier 1  |  3.86% / 15.00%</a:t>
                       </a:r>
                     </a:p>
                   </a:txBody>
@@ -3431,7 +3431,7 @@
                         <a:rPr sz="900">
                           <a:latin typeface="Segoe UI"/>
                         </a:rPr>
-                        <a:t>$1,775,848.45  (15.9% achieved)</a:t>
+                        <a:t>$1,775,848.45  (18.7% achieved)</a:t>
                       </a:r>
                     </a:p>
                   </a:txBody>
@@ -3653,7 +3653,7 @@
                         <a:rPr sz="900">
                           <a:latin typeface="Segoe UI"/>
                         </a:rPr>
-                        <a:t>Fleet Subs: 72  |  Binds: 3</a:t>
+                        <a:t>Fleet Subs: 73  |  Binds: 3</a:t>
                       </a:r>
                     </a:p>
                   </a:txBody>
@@ -3690,7 +3690,7 @@
                         <a:rPr sz="900">
                           <a:latin typeface="Segoe UI"/>
                         </a:rPr>
-                        <a:t>Fleet Bound Premium: $244,720.85</a:t>
+                        <a:t>Fleet Bound Premium: $269,537.46</a:t>
                       </a:r>
                     </a:p>
                   </a:txBody>
@@ -3727,7 +3727,7 @@
                         <a:rPr sz="900">
                           <a:latin typeface="Segoe UI"/>
                         </a:rPr>
-                        <a:t>Fleet Book %: 86.4%</a:t>
+                        <a:t>Fleet Book %: 81.2%</a:t>
                       </a:r>
                     </a:p>
                   </a:txBody>
@@ -3766,7 +3766,7 @@
                         <a:rPr sz="900">
                           <a:latin typeface="Segoe UI"/>
                         </a:rPr>
-                        <a:t>Non-Fleet Subs: 185  |  Binds: 6</a:t>
+                        <a:t>Non-Fleet Subs: 186  |  Binds: 7</a:t>
                       </a:r>
                     </a:p>
                   </a:txBody>
@@ -3803,7 +3803,7 @@
                         <a:rPr sz="900">
                           <a:latin typeface="Segoe UI"/>
                         </a:rPr>
-                        <a:t>Non-Fleet Bound Premium: $38,483.82</a:t>
+                        <a:t>Non-Fleet Bound Premium: $62,293.56</a:t>
                       </a:r>
                     </a:p>
                   </a:txBody>
@@ -3840,7 +3840,7 @@
                         <a:rPr sz="900">
                           <a:latin typeface="Segoe UI"/>
                         </a:rPr>
-                        <a:t>Non-Fleet Book %: 13.6%</a:t>
+                        <a:t>Non-Fleet Book %: 18.8%</a:t>
                       </a:r>
                     </a:p>
                   </a:txBody>
@@ -4428,7 +4428,7 @@
                           </a:solidFill>
                           <a:latin typeface="Segoe UI"/>
                         </a:rPr>
-                        <a:t>51</a:t>
+                        <a:t>53</a:t>
                       </a:r>
                     </a:p>
                   </a:txBody>
@@ -4707,7 +4707,7 @@
                           </a:solidFill>
                           <a:latin typeface="Segoe UI"/>
                         </a:rPr>
-                        <a:t>7.8%</a:t>
+                        <a:t>9.4%</a:t>
                       </a:r>
                     </a:p>
                   </a:txBody>
@@ -4983,7 +4983,7 @@
                           </a:solidFill>
                           <a:latin typeface="Segoe UI"/>
                         </a:rPr>
-                        <a:t>4</a:t>
+                        <a:t>5</a:t>
                       </a:r>
                     </a:p>
                   </a:txBody>
@@ -5259,7 +5259,7 @@
                           </a:solidFill>
                           <a:latin typeface="Segoe UI"/>
                         </a:rPr>
-                        <a:t>$25.8K</a:t>
+                        <a:t>$74.4K</a:t>
                       </a:r>
                     </a:p>
                   </a:txBody>

--- a/generated/Tier 1 Broker Scorecards/Lone Star Direct Insurance Agency LLC_Broker_Scorecard.pptx
+++ b/generated/Tier 1 Broker Scorecards/Lone Star Direct Insurance Agency LLC_Broker_Scorecard.pptx
@@ -3394,7 +3394,7 @@
                         <a:rPr sz="900">
                           <a:latin typeface="Segoe UI"/>
                         </a:rPr>
-                        <a:t>Tier 1  |  3.86% / 15.00%</a:t>
+                        <a:t>Tier 1  |  3.46% / 15.00%</a:t>
                       </a:r>
                     </a:p>
                   </a:txBody>
@@ -3690,7 +3690,7 @@
                         <a:rPr sz="900">
                           <a:latin typeface="Segoe UI"/>
                         </a:rPr>
-                        <a:t>Fleet Bound Premium: $269,537.46</a:t>
+                        <a:t>Fleet Bound Premium: $281,324.38</a:t>
                       </a:r>
                     </a:p>
                   </a:txBody>
@@ -3727,7 +3727,7 @@
                         <a:rPr sz="900">
                           <a:latin typeface="Segoe UI"/>
                         </a:rPr>
-                        <a:t>Fleet Book %: 81.2%</a:t>
+                        <a:t>Fleet Book %: 84.8%</a:t>
                       </a:r>
                     </a:p>
                   </a:txBody>
@@ -3766,7 +3766,7 @@
                         <a:rPr sz="900">
                           <a:latin typeface="Segoe UI"/>
                         </a:rPr>
-                        <a:t>Non-Fleet Subs: 186  |  Binds: 7</a:t>
+                        <a:t>Non-Fleet Subs: 187  |  Binds: 6</a:t>
                       </a:r>
                     </a:p>
                   </a:txBody>
@@ -3803,7 +3803,7 @@
                         <a:rPr sz="900">
                           <a:latin typeface="Segoe UI"/>
                         </a:rPr>
-                        <a:t>Non-Fleet Bound Premium: $62,293.56</a:t>
+                        <a:t>Non-Fleet Bound Premium: $50,506.64</a:t>
                       </a:r>
                     </a:p>
                   </a:txBody>
@@ -3840,7 +3840,7 @@
                         <a:rPr sz="900">
                           <a:latin typeface="Segoe UI"/>
                         </a:rPr>
-                        <a:t>Non-Fleet Book %: 18.8%</a:t>
+                        <a:t>Non-Fleet Book %: 15.2%</a:t>
                       </a:r>
                     </a:p>
                   </a:txBody>
@@ -4428,7 +4428,7 @@
                           </a:solidFill>
                           <a:latin typeface="Segoe UI"/>
                         </a:rPr>
-                        <a:t>53</a:t>
+                        <a:t>54</a:t>
                       </a:r>
                     </a:p>
                   </a:txBody>
@@ -4707,7 +4707,7 @@
                           </a:solidFill>
                           <a:latin typeface="Segoe UI"/>
                         </a:rPr>
-                        <a:t>9.4%</a:t>
+                        <a:t>9.3%</a:t>
                       </a:r>
                     </a:p>
                   </a:txBody>

--- a/generated/Tier 1 Broker Scorecards/Lone Star Direct Insurance Agency LLC_Broker_Scorecard.pptx
+++ b/generated/Tier 1 Broker Scorecards/Lone Star Direct Insurance Agency LLC_Broker_Scorecard.pptx
@@ -3357,7 +3357,7 @@
                         <a:rPr sz="800">
                           <a:latin typeface="Segoe UI"/>
                         </a:rPr>
-                        <a:t>$1,268,463.18 / $1,098,788.64 / $331,831.02</a:t>
+                        <a:t>$1,268,463.18 / $1,098,192.86 / $331,235.24</a:t>
                       </a:r>
                     </a:p>
                   </a:txBody>
@@ -3394,7 +3394,7 @@
                         <a:rPr sz="900">
                           <a:latin typeface="Segoe UI"/>
                         </a:rPr>
-                        <a:t>Tier 1  |  3.46% / 15.00%</a:t>
+                        <a:t>Tier 1  |  4.21% / 15.00%</a:t>
                       </a:r>
                     </a:p>
                   </a:txBody>
@@ -3653,7 +3653,7 @@
                         <a:rPr sz="900">
                           <a:latin typeface="Segoe UI"/>
                         </a:rPr>
-                        <a:t>Fleet Subs: 73  |  Binds: 3</a:t>
+                        <a:t>Fleet Subs: 72  |  Binds: 3</a:t>
                       </a:r>
                     </a:p>
                   </a:txBody>
@@ -3690,7 +3690,7 @@
                         <a:rPr sz="900">
                           <a:latin typeface="Segoe UI"/>
                         </a:rPr>
-                        <a:t>Fleet Bound Premium: $281,324.38</a:t>
+                        <a:t>Fleet Bound Premium: $250,411.27</a:t>
                       </a:r>
                     </a:p>
                   </a:txBody>
@@ -3727,7 +3727,7 @@
                         <a:rPr sz="900">
                           <a:latin typeface="Segoe UI"/>
                         </a:rPr>
-                        <a:t>Fleet Book %: 84.8%</a:t>
+                        <a:t>Fleet Book %: 75.6%</a:t>
                       </a:r>
                     </a:p>
                   </a:txBody>
@@ -3766,7 +3766,7 @@
                         <a:rPr sz="900">
                           <a:latin typeface="Segoe UI"/>
                         </a:rPr>
-                        <a:t>Non-Fleet Subs: 187  |  Binds: 6</a:t>
+                        <a:t>Non-Fleet Subs: 189  |  Binds: 8</a:t>
                       </a:r>
                     </a:p>
                   </a:txBody>
@@ -3803,7 +3803,7 @@
                         <a:rPr sz="900">
                           <a:latin typeface="Segoe UI"/>
                         </a:rPr>
-                        <a:t>Non-Fleet Bound Premium: $50,506.64</a:t>
+                        <a:t>Non-Fleet Bound Premium: $80,823.97</a:t>
                       </a:r>
                     </a:p>
                   </a:txBody>
@@ -3840,7 +3840,7 @@
                         <a:rPr sz="900">
                           <a:latin typeface="Segoe UI"/>
                         </a:rPr>
-                        <a:t>Non-Fleet Book %: 15.2%</a:t>
+                        <a:t>Non-Fleet Book %: 24.4%</a:t>
                       </a:r>
                     </a:p>
                   </a:txBody>
@@ -4428,7 +4428,7 @@
                           </a:solidFill>
                           <a:latin typeface="Segoe UI"/>
                         </a:rPr>
-                        <a:t>54</a:t>
+                        <a:t>55</a:t>
                       </a:r>
                     </a:p>
                   </a:txBody>
@@ -4707,7 +4707,7 @@
                           </a:solidFill>
                           <a:latin typeface="Segoe UI"/>
                         </a:rPr>
-                        <a:t>9.3%</a:t>
+                        <a:t>12.7%</a:t>
                       </a:r>
                     </a:p>
                   </a:txBody>
@@ -4978,12 +4978,9 @@
                       <a:pPr algn="ctr"/>
                       <a:r>
                         <a:rPr sz="800">
-                          <a:solidFill>
-                            <a:srgbClr val="DC2626"/>
-                          </a:solidFill>
                           <a:latin typeface="Segoe UI"/>
                         </a:rPr>
-                        <a:t>5</a:t>
+                        <a:t>7</a:t>
                       </a:r>
                     </a:p>
                   </a:txBody>
@@ -5259,7 +5256,7 @@
                           </a:solidFill>
                           <a:latin typeface="Segoe UI"/>
                         </a:rPr>
-                        <a:t>$74.4K</a:t>
+                        <a:t>$73.8K</a:t>
                       </a:r>
                     </a:p>
                   </a:txBody>

--- a/generated/Tier 1 Broker Scorecards/Lone Star Direct Insurance Agency LLC_Broker_Scorecard.pptx
+++ b/generated/Tier 1 Broker Scorecards/Lone Star Direct Insurance Agency LLC_Broker_Scorecard.pptx
@@ -3394,7 +3394,7 @@
                         <a:rPr sz="900">
                           <a:latin typeface="Segoe UI"/>
                         </a:rPr>
-                        <a:t>Tier 1  |  4.21% / 15.00%</a:t>
+                        <a:t>Tier 1  |  3.44% / 15.00%</a:t>
                       </a:r>
                     </a:p>
                   </a:txBody>
@@ -3690,7 +3690,7 @@
                         <a:rPr sz="900">
                           <a:latin typeface="Segoe UI"/>
                         </a:rPr>
-                        <a:t>Fleet Bound Premium: $250,411.27</a:t>
+                        <a:t>Fleet Bound Premium: $265,176.48</a:t>
                       </a:r>
                     </a:p>
                   </a:txBody>
@@ -3727,7 +3727,7 @@
                         <a:rPr sz="900">
                           <a:latin typeface="Segoe UI"/>
                         </a:rPr>
-                        <a:t>Fleet Book %: 75.6%</a:t>
+                        <a:t>Fleet Book %: 80.1%</a:t>
                       </a:r>
                     </a:p>
                   </a:txBody>
@@ -3766,7 +3766,7 @@
                         <a:rPr sz="900">
                           <a:latin typeface="Segoe UI"/>
                         </a:rPr>
-                        <a:t>Non-Fleet Subs: 189  |  Binds: 8</a:t>
+                        <a:t>Non-Fleet Subs: 190  |  Binds: 6</a:t>
                       </a:r>
                     </a:p>
                   </a:txBody>
@@ -3803,7 +3803,7 @@
                         <a:rPr sz="900">
                           <a:latin typeface="Segoe UI"/>
                         </a:rPr>
-                        <a:t>Non-Fleet Bound Premium: $80,823.97</a:t>
+                        <a:t>Non-Fleet Bound Premium: $66,058.76</a:t>
                       </a:r>
                     </a:p>
                   </a:txBody>
@@ -3840,7 +3840,7 @@
                         <a:rPr sz="900">
                           <a:latin typeface="Segoe UI"/>
                         </a:rPr>
-                        <a:t>Non-Fleet Book %: 24.4%</a:t>
+                        <a:t>Non-Fleet Book %: 19.9%</a:t>
                       </a:r>
                     </a:p>
                   </a:txBody>
@@ -4428,7 +4428,7 @@
                           </a:solidFill>
                           <a:latin typeface="Segoe UI"/>
                         </a:rPr>
-                        <a:t>55</a:t>
+                        <a:t>56</a:t>
                       </a:r>
                     </a:p>
                   </a:txBody>
@@ -4707,7 +4707,7 @@
                           </a:solidFill>
                           <a:latin typeface="Segoe UI"/>
                         </a:rPr>
-                        <a:t>12.7%</a:t>
+                        <a:t>10.7%</a:t>
                       </a:r>
                     </a:p>
                   </a:txBody>
@@ -4978,9 +4978,12 @@
                       <a:pPr algn="ctr"/>
                       <a:r>
                         <a:rPr sz="800">
+                          <a:solidFill>
+                            <a:srgbClr val="DC2626"/>
+                          </a:solidFill>
                           <a:latin typeface="Segoe UI"/>
                         </a:rPr>
-                        <a:t>7</a:t>
+                        <a:t>6</a:t>
                       </a:r>
                     </a:p>
                   </a:txBody>

--- a/generated/Tier 1 Broker Scorecards/Lone Star Direct Insurance Agency LLC_Broker_Scorecard.pptx
+++ b/generated/Tier 1 Broker Scorecards/Lone Star Direct Insurance Agency LLC_Broker_Scorecard.pptx
@@ -3357,7 +3357,7 @@
                         <a:rPr sz="800">
                           <a:latin typeface="Segoe UI"/>
                         </a:rPr>
-                        <a:t>$1,268,463.18 / $1,098,192.86 / $331,235.24</a:t>
+                        <a:t>$1,268,463.18 / $738,544.95 / $331,235.24</a:t>
                       </a:r>
                     </a:p>
                   </a:txBody>
